--- a/tests/OfficeAgent.Tests/Corpus/v1.0.0/native/inputs/p-inserttable.pptx
+++ b/tests/OfficeAgent.Tests/Corpus/v1.0.0/native/inputs/p-inserttable.pptx
@@ -2,10 +2,10 @@
 <file path=ppt/presentation.xml><?xml version="1.0" encoding="utf-8"?>
 <p:presentation xmlns:p="http://schemas.openxmlformats.org/presentationml/2006/main">
   <p:sldMasterIdLst>
-    <p:sldMasterId xmlns:r="http://schemas.openxmlformats.org/officeDocument/2006/relationships" id="2147483648" r:id="R916440d68ab64666"/>
+    <p:sldMasterId xmlns:r="http://schemas.openxmlformats.org/officeDocument/2006/relationships" id="2147483648" r:id="R707cbd82eac54df2"/>
   </p:sldMasterIdLst>
   <p:sldIdLst>
-    <p:sldId xmlns:r="http://schemas.openxmlformats.org/officeDocument/2006/relationships" id="256" r:id="R22618ed32a004f88"/>
+    <p:sldId xmlns:r="http://schemas.openxmlformats.org/officeDocument/2006/relationships" id="256" r:id="R8d739792fa344d4f"/>
   </p:sldIdLst>
   <p:sldSz cx="12192000" cy="6858000"/>
   <p:notesSz cx="6858000" cy="9144000"/>
@@ -386,11 +386,11 @@
   </p:cSld>
   <p:clrMap bg1="lt1" tx1="dk1" bg2="lt2" tx2="dk2" accent1="accent1" accent2="accent2" accent3="accent3" accent4="accent4" accent5="accent5" accent6="accent6" hlink="hlink" folHlink="folHlink"/>
   <p:sldLayoutIdLst>
-    <p:sldLayoutId xmlns:r="http://schemas.openxmlformats.org/officeDocument/2006/relationships" id="2147483649" r:id="Rac9e79c6401749bb"/>
-    <p:sldLayoutId xmlns:r="http://schemas.openxmlformats.org/officeDocument/2006/relationships" id="2147483650" r:id="R7fabeaa8993c4cb2"/>
-    <p:sldLayoutId xmlns:r="http://schemas.openxmlformats.org/officeDocument/2006/relationships" id="2147483651" r:id="R7609d00c6fd54429"/>
-    <p:sldLayoutId xmlns:r="http://schemas.openxmlformats.org/officeDocument/2006/relationships" id="2147483652" r:id="R93342eeaa1b247ef"/>
-    <p:sldLayoutId xmlns:r="http://schemas.openxmlformats.org/officeDocument/2006/relationships" id="2147483653" r:id="Rcbe91dcdfa024b94"/>
+    <p:sldLayoutId xmlns:r="http://schemas.openxmlformats.org/officeDocument/2006/relationships" id="2147483649" r:id="R6e0f1e0989794744"/>
+    <p:sldLayoutId xmlns:r="http://schemas.openxmlformats.org/officeDocument/2006/relationships" id="2147483650" r:id="R15929cd3a402430c"/>
+    <p:sldLayoutId xmlns:r="http://schemas.openxmlformats.org/officeDocument/2006/relationships" id="2147483651" r:id="R7d1174a2fd704fef"/>
+    <p:sldLayoutId xmlns:r="http://schemas.openxmlformats.org/officeDocument/2006/relationships" id="2147483652" r:id="R949d7f2861484a9e"/>
+    <p:sldLayoutId xmlns:r="http://schemas.openxmlformats.org/officeDocument/2006/relationships" id="2147483653" r:id="R217741fdca8d469d"/>
   </p:sldLayoutIdLst>
 </p:sldMaster>
 </file>

--- a/tests/OfficeAgent.Tests/Corpus/v1.0.0/native/inputs/p-inserttable.pptx
+++ b/tests/OfficeAgent.Tests/Corpus/v1.0.0/native/inputs/p-inserttable.pptx
@@ -2,10 +2,10 @@
 <file path=ppt/presentation.xml><?xml version="1.0" encoding="utf-8"?>
 <p:presentation xmlns:p="http://schemas.openxmlformats.org/presentationml/2006/main">
   <p:sldMasterIdLst>
-    <p:sldMasterId xmlns:r="http://schemas.openxmlformats.org/officeDocument/2006/relationships" id="2147483648" r:id="R707cbd82eac54df2"/>
+    <p:sldMasterId xmlns:r="http://schemas.openxmlformats.org/officeDocument/2006/relationships" id="2147483648" r:id="Ree0542f67a194c95"/>
   </p:sldMasterIdLst>
   <p:sldIdLst>
-    <p:sldId xmlns:r="http://schemas.openxmlformats.org/officeDocument/2006/relationships" id="256" r:id="R8d739792fa344d4f"/>
+    <p:sldId xmlns:r="http://schemas.openxmlformats.org/officeDocument/2006/relationships" id="256" r:id="R9c00de0bc16e47c8"/>
   </p:sldIdLst>
   <p:sldSz cx="12192000" cy="6858000"/>
   <p:notesSz cx="6858000" cy="9144000"/>
@@ -386,11 +386,11 @@
   </p:cSld>
   <p:clrMap bg1="lt1" tx1="dk1" bg2="lt2" tx2="dk2" accent1="accent1" accent2="accent2" accent3="accent3" accent4="accent4" accent5="accent5" accent6="accent6" hlink="hlink" folHlink="folHlink"/>
   <p:sldLayoutIdLst>
-    <p:sldLayoutId xmlns:r="http://schemas.openxmlformats.org/officeDocument/2006/relationships" id="2147483649" r:id="R6e0f1e0989794744"/>
-    <p:sldLayoutId xmlns:r="http://schemas.openxmlformats.org/officeDocument/2006/relationships" id="2147483650" r:id="R15929cd3a402430c"/>
-    <p:sldLayoutId xmlns:r="http://schemas.openxmlformats.org/officeDocument/2006/relationships" id="2147483651" r:id="R7d1174a2fd704fef"/>
-    <p:sldLayoutId xmlns:r="http://schemas.openxmlformats.org/officeDocument/2006/relationships" id="2147483652" r:id="R949d7f2861484a9e"/>
-    <p:sldLayoutId xmlns:r="http://schemas.openxmlformats.org/officeDocument/2006/relationships" id="2147483653" r:id="R217741fdca8d469d"/>
+    <p:sldLayoutId xmlns:r="http://schemas.openxmlformats.org/officeDocument/2006/relationships" id="2147483649" r:id="R2d4efc6d60fd442b"/>
+    <p:sldLayoutId xmlns:r="http://schemas.openxmlformats.org/officeDocument/2006/relationships" id="2147483650" r:id="R8afd314d8a9e4275"/>
+    <p:sldLayoutId xmlns:r="http://schemas.openxmlformats.org/officeDocument/2006/relationships" id="2147483651" r:id="Rab50c4e9da074de5"/>
+    <p:sldLayoutId xmlns:r="http://schemas.openxmlformats.org/officeDocument/2006/relationships" id="2147483652" r:id="R6de86fb03e5145bf"/>
+    <p:sldLayoutId xmlns:r="http://schemas.openxmlformats.org/officeDocument/2006/relationships" id="2147483653" r:id="R399f3e6348d04ca3"/>
   </p:sldLayoutIdLst>
 </p:sldMaster>
 </file>

--- a/tests/OfficeAgent.Tests/Corpus/v1.0.0/native/inputs/p-inserttable.pptx
+++ b/tests/OfficeAgent.Tests/Corpus/v1.0.0/native/inputs/p-inserttable.pptx
@@ -2,10 +2,10 @@
 <file path=ppt/presentation.xml><?xml version="1.0" encoding="utf-8"?>
 <p:presentation xmlns:p="http://schemas.openxmlformats.org/presentationml/2006/main">
   <p:sldMasterIdLst>
-    <p:sldMasterId xmlns:r="http://schemas.openxmlformats.org/officeDocument/2006/relationships" id="2147483648" r:id="Ree0542f67a194c95"/>
+    <p:sldMasterId xmlns:r="http://schemas.openxmlformats.org/officeDocument/2006/relationships" id="2147483648" r:id="Rb8ab969e9bea47ea"/>
   </p:sldMasterIdLst>
   <p:sldIdLst>
-    <p:sldId xmlns:r="http://schemas.openxmlformats.org/officeDocument/2006/relationships" id="256" r:id="R9c00de0bc16e47c8"/>
+    <p:sldId xmlns:r="http://schemas.openxmlformats.org/officeDocument/2006/relationships" id="256" r:id="Re6771c9a8e93487f"/>
   </p:sldIdLst>
   <p:sldSz cx="12192000" cy="6858000"/>
   <p:notesSz cx="6858000" cy="9144000"/>
@@ -386,11 +386,11 @@
   </p:cSld>
   <p:clrMap bg1="lt1" tx1="dk1" bg2="lt2" tx2="dk2" accent1="accent1" accent2="accent2" accent3="accent3" accent4="accent4" accent5="accent5" accent6="accent6" hlink="hlink" folHlink="folHlink"/>
   <p:sldLayoutIdLst>
-    <p:sldLayoutId xmlns:r="http://schemas.openxmlformats.org/officeDocument/2006/relationships" id="2147483649" r:id="R2d4efc6d60fd442b"/>
-    <p:sldLayoutId xmlns:r="http://schemas.openxmlformats.org/officeDocument/2006/relationships" id="2147483650" r:id="R8afd314d8a9e4275"/>
-    <p:sldLayoutId xmlns:r="http://schemas.openxmlformats.org/officeDocument/2006/relationships" id="2147483651" r:id="Rab50c4e9da074de5"/>
-    <p:sldLayoutId xmlns:r="http://schemas.openxmlformats.org/officeDocument/2006/relationships" id="2147483652" r:id="R6de86fb03e5145bf"/>
-    <p:sldLayoutId xmlns:r="http://schemas.openxmlformats.org/officeDocument/2006/relationships" id="2147483653" r:id="R399f3e6348d04ca3"/>
+    <p:sldLayoutId xmlns:r="http://schemas.openxmlformats.org/officeDocument/2006/relationships" id="2147483649" r:id="R8fe677c4dff343e7"/>
+    <p:sldLayoutId xmlns:r="http://schemas.openxmlformats.org/officeDocument/2006/relationships" id="2147483650" r:id="Re6c1a861bf6a4acb"/>
+    <p:sldLayoutId xmlns:r="http://schemas.openxmlformats.org/officeDocument/2006/relationships" id="2147483651" r:id="R3ea7f72f451a4d34"/>
+    <p:sldLayoutId xmlns:r="http://schemas.openxmlformats.org/officeDocument/2006/relationships" id="2147483652" r:id="R9e1171f7f48a4cf7"/>
+    <p:sldLayoutId xmlns:r="http://schemas.openxmlformats.org/officeDocument/2006/relationships" id="2147483653" r:id="Ra96bbc5d8d9949c7"/>
   </p:sldLayoutIdLst>
 </p:sldMaster>
 </file>

--- a/tests/OfficeAgent.Tests/Corpus/v1.0.0/native/inputs/p-inserttable.pptx
+++ b/tests/OfficeAgent.Tests/Corpus/v1.0.0/native/inputs/p-inserttable.pptx
@@ -2,10 +2,10 @@
 <file path=ppt/presentation.xml><?xml version="1.0" encoding="utf-8"?>
 <p:presentation xmlns:p="http://schemas.openxmlformats.org/presentationml/2006/main">
   <p:sldMasterIdLst>
-    <p:sldMasterId xmlns:r="http://schemas.openxmlformats.org/officeDocument/2006/relationships" id="2147483648" r:id="Rb8ab969e9bea47ea"/>
+    <p:sldMasterId xmlns:r="http://schemas.openxmlformats.org/officeDocument/2006/relationships" id="2147483648" r:id="R87b684179f394c07"/>
   </p:sldMasterIdLst>
   <p:sldIdLst>
-    <p:sldId xmlns:r="http://schemas.openxmlformats.org/officeDocument/2006/relationships" id="256" r:id="Re6771c9a8e93487f"/>
+    <p:sldId xmlns:r="http://schemas.openxmlformats.org/officeDocument/2006/relationships" id="256" r:id="R6235b50e616d4ed1"/>
   </p:sldIdLst>
   <p:sldSz cx="12192000" cy="6858000"/>
   <p:notesSz cx="6858000" cy="9144000"/>
@@ -386,11 +386,11 @@
   </p:cSld>
   <p:clrMap bg1="lt1" tx1="dk1" bg2="lt2" tx2="dk2" accent1="accent1" accent2="accent2" accent3="accent3" accent4="accent4" accent5="accent5" accent6="accent6" hlink="hlink" folHlink="folHlink"/>
   <p:sldLayoutIdLst>
-    <p:sldLayoutId xmlns:r="http://schemas.openxmlformats.org/officeDocument/2006/relationships" id="2147483649" r:id="R8fe677c4dff343e7"/>
-    <p:sldLayoutId xmlns:r="http://schemas.openxmlformats.org/officeDocument/2006/relationships" id="2147483650" r:id="Re6c1a861bf6a4acb"/>
-    <p:sldLayoutId xmlns:r="http://schemas.openxmlformats.org/officeDocument/2006/relationships" id="2147483651" r:id="R3ea7f72f451a4d34"/>
-    <p:sldLayoutId xmlns:r="http://schemas.openxmlformats.org/officeDocument/2006/relationships" id="2147483652" r:id="R9e1171f7f48a4cf7"/>
-    <p:sldLayoutId xmlns:r="http://schemas.openxmlformats.org/officeDocument/2006/relationships" id="2147483653" r:id="Ra96bbc5d8d9949c7"/>
+    <p:sldLayoutId xmlns:r="http://schemas.openxmlformats.org/officeDocument/2006/relationships" id="2147483649" r:id="Rf514c5811c644e55"/>
+    <p:sldLayoutId xmlns:r="http://schemas.openxmlformats.org/officeDocument/2006/relationships" id="2147483650" r:id="Rfe73d59c5ce14e2c"/>
+    <p:sldLayoutId xmlns:r="http://schemas.openxmlformats.org/officeDocument/2006/relationships" id="2147483651" r:id="R1f62dbcc8d1c4759"/>
+    <p:sldLayoutId xmlns:r="http://schemas.openxmlformats.org/officeDocument/2006/relationships" id="2147483652" r:id="Rb940e2903a424734"/>
+    <p:sldLayoutId xmlns:r="http://schemas.openxmlformats.org/officeDocument/2006/relationships" id="2147483653" r:id="Rb6af0cbe56aa4ca8"/>
   </p:sldLayoutIdLst>
 </p:sldMaster>
 </file>

--- a/tests/OfficeAgent.Tests/Corpus/v1.0.0/native/inputs/p-inserttable.pptx
+++ b/tests/OfficeAgent.Tests/Corpus/v1.0.0/native/inputs/p-inserttable.pptx
@@ -2,10 +2,10 @@
 <file path=ppt/presentation.xml><?xml version="1.0" encoding="utf-8"?>
 <p:presentation xmlns:p="http://schemas.openxmlformats.org/presentationml/2006/main">
   <p:sldMasterIdLst>
-    <p:sldMasterId xmlns:r="http://schemas.openxmlformats.org/officeDocument/2006/relationships" id="2147483648" r:id="R87b684179f394c07"/>
+    <p:sldMasterId xmlns:r="http://schemas.openxmlformats.org/officeDocument/2006/relationships" id="2147483648" r:id="R3571ef19ffac408f"/>
   </p:sldMasterIdLst>
   <p:sldIdLst>
-    <p:sldId xmlns:r="http://schemas.openxmlformats.org/officeDocument/2006/relationships" id="256" r:id="R6235b50e616d4ed1"/>
+    <p:sldId xmlns:r="http://schemas.openxmlformats.org/officeDocument/2006/relationships" id="256" r:id="R8bd61e1dc91b42b0"/>
   </p:sldIdLst>
   <p:sldSz cx="12192000" cy="6858000"/>
   <p:notesSz cx="6858000" cy="9144000"/>
@@ -386,11 +386,11 @@
   </p:cSld>
   <p:clrMap bg1="lt1" tx1="dk1" bg2="lt2" tx2="dk2" accent1="accent1" accent2="accent2" accent3="accent3" accent4="accent4" accent5="accent5" accent6="accent6" hlink="hlink" folHlink="folHlink"/>
   <p:sldLayoutIdLst>
-    <p:sldLayoutId xmlns:r="http://schemas.openxmlformats.org/officeDocument/2006/relationships" id="2147483649" r:id="Rf514c5811c644e55"/>
-    <p:sldLayoutId xmlns:r="http://schemas.openxmlformats.org/officeDocument/2006/relationships" id="2147483650" r:id="Rfe73d59c5ce14e2c"/>
-    <p:sldLayoutId xmlns:r="http://schemas.openxmlformats.org/officeDocument/2006/relationships" id="2147483651" r:id="R1f62dbcc8d1c4759"/>
-    <p:sldLayoutId xmlns:r="http://schemas.openxmlformats.org/officeDocument/2006/relationships" id="2147483652" r:id="Rb940e2903a424734"/>
-    <p:sldLayoutId xmlns:r="http://schemas.openxmlformats.org/officeDocument/2006/relationships" id="2147483653" r:id="Rb6af0cbe56aa4ca8"/>
+    <p:sldLayoutId xmlns:r="http://schemas.openxmlformats.org/officeDocument/2006/relationships" id="2147483649" r:id="Rc7cc40fed78441b0"/>
+    <p:sldLayoutId xmlns:r="http://schemas.openxmlformats.org/officeDocument/2006/relationships" id="2147483650" r:id="R50778fa9ffb346ce"/>
+    <p:sldLayoutId xmlns:r="http://schemas.openxmlformats.org/officeDocument/2006/relationships" id="2147483651" r:id="Rbab7dd55de19412b"/>
+    <p:sldLayoutId xmlns:r="http://schemas.openxmlformats.org/officeDocument/2006/relationships" id="2147483652" r:id="R02f59eb4248a4ca6"/>
+    <p:sldLayoutId xmlns:r="http://schemas.openxmlformats.org/officeDocument/2006/relationships" id="2147483653" r:id="R9e8eb23b4ca24bf0"/>
   </p:sldLayoutIdLst>
 </p:sldMaster>
 </file>
